--- a/assets/pptx/catalog-290.pptx
+++ b/assets/pptx/catalog-290.pptx
@@ -3786,7 +3786,7 @@
                 <a:ea typeface="Ebrima"/>
                 <a:cs typeface="Ebrima"/>
               </a:rPr>
-              <a:t>ድጋሜ አላጠፋም ለዛሬም ይቅርታ (2x)</a:t>
+              <a:t>ድጋሜ አላጠፋም ለዛሬም ይቅርታ 2x</a:t>
             </a:r>
           </a:p>
         </p:txBody>
@@ -3853,7 +3853,7 @@
                 <a:ea typeface="Ebrima"/>
                 <a:cs typeface="Ebrima"/>
               </a:rPr>
-              <a:t>ይቅርታ (2x) ይቅርታ (4x)</a:t>
+              <a:t>ይቅርታ 2x ይቅርታ 4x</a:t>
             </a:r>
           </a:p>
           <a:p>
@@ -3871,7 +3871,7 @@
                 <a:ea typeface="Ebrima"/>
                 <a:cs typeface="Ebrima"/>
               </a:rPr>
-              <a:t>ይቅርታ (2x) ይቅርታ (4x)</a:t>
+              <a:t>ይቅርታ 2x ይቅርታ 4x</a:t>
             </a:r>
           </a:p>
         </p:txBody>
@@ -4077,7 +4077,7 @@
                 <a:ea typeface="Ebrima"/>
                 <a:cs typeface="Ebrima"/>
               </a:rPr>
-              <a:t>I love you (እወድሻለሁ) (6x)</a:t>
+              <a:t>I love you እወድሻለሁ 6x</a:t>
             </a:r>
           </a:p>
           <a:p>
@@ -4095,7 +4095,7 @@
                 <a:ea typeface="Ebrima"/>
                 <a:cs typeface="Ebrima"/>
               </a:rPr>
-              <a:t>I love you (እወድሻለሁ) (6x)</a:t>
+              <a:t>I love you እወድሻለሁ 6x</a:t>
             </a:r>
           </a:p>
         </p:txBody>
